--- a/SRWE_Module_16.pptx
+++ b/SRWE_Module_16.pptx
@@ -216,6 +216,69 @@
 </p:cmAuthorLst>
 </file>
 
+<file path=ppt/changesInfos/changesInfo1.xml><?xml version="1.0" encoding="utf-8"?>
+<pc:chgInfo xmlns:a="http://schemas.openxmlformats.org/drawingml/2006/main" xmlns:r="http://schemas.openxmlformats.org/officeDocument/2006/relationships" xmlns:ac="http://schemas.microsoft.com/office/drawing/2013/main/command" xmlns:pc="http://schemas.microsoft.com/office/powerpoint/2013/main/command">
+  <pc:docChgLst>
+    <pc:chgData name="Baráth, Július" userId="aebde9b9-dccc-4475-a9ac-c05e78323d7a" providerId="ADAL" clId="{4A0811C8-ED2F-505E-B787-C8270CED5046}"/>
+    <pc:docChg chg="modSld">
+      <pc:chgData name="Baráth, Július" userId="aebde9b9-dccc-4475-a9ac-c05e78323d7a" providerId="ADAL" clId="{4A0811C8-ED2F-505E-B787-C8270CED5046}" dt="2026-05-18T09:47:26.140" v="1" actId="729"/>
+      <pc:docMkLst>
+        <pc:docMk/>
+      </pc:docMkLst>
+      <pc:sldChg chg="mod modShow">
+        <pc:chgData name="Baráth, Július" userId="aebde9b9-dccc-4475-a9ac-c05e78323d7a" providerId="ADAL" clId="{4A0811C8-ED2F-505E-B787-C8270CED5046}" dt="2026-05-18T09:47:07.922" v="0" actId="729"/>
+        <pc:sldMkLst>
+          <pc:docMk/>
+          <pc:sldMk cId="343650477" sldId="513"/>
+        </pc:sldMkLst>
+      </pc:sldChg>
+      <pc:sldChg chg="mod modShow">
+        <pc:chgData name="Baráth, Július" userId="aebde9b9-dccc-4475-a9ac-c05e78323d7a" providerId="ADAL" clId="{4A0811C8-ED2F-505E-B787-C8270CED5046}" dt="2026-05-18T09:47:26.140" v="1" actId="729"/>
+        <pc:sldMkLst>
+          <pc:docMk/>
+          <pc:sldMk cId="410599242" sldId="957"/>
+        </pc:sldMkLst>
+      </pc:sldChg>
+      <pc:sldChg chg="mod modShow">
+        <pc:chgData name="Baráth, Július" userId="aebde9b9-dccc-4475-a9ac-c05e78323d7a" providerId="ADAL" clId="{4A0811C8-ED2F-505E-B787-C8270CED5046}" dt="2026-05-18T09:47:26.140" v="1" actId="729"/>
+        <pc:sldMkLst>
+          <pc:docMk/>
+          <pc:sldMk cId="2548999575" sldId="958"/>
+        </pc:sldMkLst>
+      </pc:sldChg>
+      <pc:sldChg chg="mod modShow">
+        <pc:chgData name="Baráth, Július" userId="aebde9b9-dccc-4475-a9ac-c05e78323d7a" providerId="ADAL" clId="{4A0811C8-ED2F-505E-B787-C8270CED5046}" dt="2026-05-18T09:47:26.140" v="1" actId="729"/>
+        <pc:sldMkLst>
+          <pc:docMk/>
+          <pc:sldMk cId="2556431342" sldId="1155"/>
+        </pc:sldMkLst>
+      </pc:sldChg>
+      <pc:sldChg chg="mod modShow">
+        <pc:chgData name="Baráth, Július" userId="aebde9b9-dccc-4475-a9ac-c05e78323d7a" providerId="ADAL" clId="{4A0811C8-ED2F-505E-B787-C8270CED5046}" dt="2026-05-18T09:47:26.140" v="1" actId="729"/>
+        <pc:sldMkLst>
+          <pc:docMk/>
+          <pc:sldMk cId="1575232868" sldId="1156"/>
+        </pc:sldMkLst>
+      </pc:sldChg>
+      <pc:sldChg chg="mod modShow">
+        <pc:chgData name="Baráth, Július" userId="aebde9b9-dccc-4475-a9ac-c05e78323d7a" providerId="ADAL" clId="{4A0811C8-ED2F-505E-B787-C8270CED5046}" dt="2026-05-18T09:47:26.140" v="1" actId="729"/>
+        <pc:sldMkLst>
+          <pc:docMk/>
+          <pc:sldMk cId="2045065826" sldId="1157"/>
+        </pc:sldMkLst>
+      </pc:sldChg>
+      <pc:sldChg chg="mod modShow">
+        <pc:chgData name="Baráth, Július" userId="aebde9b9-dccc-4475-a9ac-c05e78323d7a" providerId="ADAL" clId="{4A0811C8-ED2F-505E-B787-C8270CED5046}" dt="2026-05-18T09:47:26.140" v="1" actId="729"/>
+        <pc:sldMkLst>
+          <pc:docMk/>
+          <pc:sldMk cId="4271908604" sldId="1158"/>
+        </pc:sldMkLst>
+      </pc:sldChg>
+    </pc:docChg>
+  </pc:docChgLst>
+</pc:chgInfo>
+</file>
+
 <file path=ppt/notesMasters/notesMaster1.xml><?xml version="1.0" encoding="utf-8"?>
 <p:notesMaster xmlns:a="http://schemas.openxmlformats.org/drawingml/2006/main" xmlns:r="http://schemas.openxmlformats.org/officeDocument/2006/relationships" xmlns:p="http://schemas.openxmlformats.org/presentationml/2006/main">
   <p:cSld>
@@ -298,7 +361,7 @@
           <a:p>
             <a:fld id="{136337D9-3022-3D41-8D8A-BDF2F3B0DD8E}" type="datetimeFigureOut">
               <a:rPr lang="en-US" smtClean="0"/>
-              <a:t>12/6/2019</a:t>
+              <a:t>5/18/26</a:t>
             </a:fld>
             <a:endParaRPr lang="en-US" dirty="0"/>
           </a:p>
@@ -27100,7 +27163,7 @@
 </file>
 
 <file path=ppt/slides/slide1.xml><?xml version="1.0" encoding="utf-8"?>
-<p:sld xmlns:a="http://schemas.openxmlformats.org/drawingml/2006/main" xmlns:r="http://schemas.openxmlformats.org/officeDocument/2006/relationships" xmlns:p="http://schemas.openxmlformats.org/presentationml/2006/main">
+<p:sld xmlns:a="http://schemas.openxmlformats.org/drawingml/2006/main" xmlns:r="http://schemas.openxmlformats.org/officeDocument/2006/relationships" xmlns:p="http://schemas.openxmlformats.org/presentationml/2006/main" show="0">
   <p:cSld>
     <p:spTree>
       <p:nvGrpSpPr>
@@ -30811,7 +30874,7 @@
 </file>
 
 <file path=ppt/slides/slide18.xml><?xml version="1.0" encoding="utf-8"?>
-<p:sld xmlns:a="http://schemas.openxmlformats.org/drawingml/2006/main" xmlns:r="http://schemas.openxmlformats.org/officeDocument/2006/relationships" xmlns:p="http://schemas.openxmlformats.org/presentationml/2006/main">
+<p:sld xmlns:a="http://schemas.openxmlformats.org/drawingml/2006/main" xmlns:r="http://schemas.openxmlformats.org/officeDocument/2006/relationships" xmlns:p="http://schemas.openxmlformats.org/presentationml/2006/main" show="0">
   <p:cSld>
     <p:spTree>
       <p:nvGrpSpPr>
@@ -30881,7 +30944,7 @@
 </file>
 
 <file path=ppt/slides/slide19.xml><?xml version="1.0" encoding="utf-8"?>
-<p:sld xmlns:a="http://schemas.openxmlformats.org/drawingml/2006/main" xmlns:r="http://schemas.openxmlformats.org/officeDocument/2006/relationships" xmlns:p="http://schemas.openxmlformats.org/presentationml/2006/main">
+<p:sld xmlns:a="http://schemas.openxmlformats.org/drawingml/2006/main" xmlns:r="http://schemas.openxmlformats.org/officeDocument/2006/relationships" xmlns:p="http://schemas.openxmlformats.org/presentationml/2006/main" show="0">
   <p:cSld>
     <p:spTree>
       <p:nvGrpSpPr>
@@ -31056,14 +31119,14 @@
   <p:clrMapOvr>
     <a:masterClrMapping/>
   </p:clrMapOvr>
-  <mc:AlternateContent xmlns:mc="http://schemas.openxmlformats.org/markup-compatibility/2006" xmlns:p14="http://schemas.microsoft.com/office/powerpoint/2010/main">
-    <mc:Choice Requires="p14">
+  <mc:AlternateContent xmlns:mc="http://schemas.openxmlformats.org/markup-compatibility/2006">
+    <mc:Choice xmlns:p14="http://schemas.microsoft.com/office/powerpoint/2010/main" Requires="p14">
       <p:transition spd="med" p14:dur="700">
         <p:fade/>
       </p:transition>
     </mc:Choice>
-    <mc:Fallback xmlns="">
-      <p:transition xmlns:p14="http://schemas.microsoft.com/office/powerpoint/2010/main" spd="med">
+    <mc:Fallback>
+      <p:transition spd="med">
         <p:fade/>
       </p:transition>
     </mc:Fallback>
@@ -31259,7 +31322,7 @@
 </file>
 
 <file path=ppt/slides/slide20.xml><?xml version="1.0" encoding="utf-8"?>
-<p:sld xmlns:a="http://schemas.openxmlformats.org/drawingml/2006/main" xmlns:r="http://schemas.openxmlformats.org/officeDocument/2006/relationships" xmlns:p="http://schemas.openxmlformats.org/presentationml/2006/main">
+<p:sld xmlns:a="http://schemas.openxmlformats.org/drawingml/2006/main" xmlns:r="http://schemas.openxmlformats.org/officeDocument/2006/relationships" xmlns:p="http://schemas.openxmlformats.org/presentationml/2006/main" show="0">
   <p:cSld>
     <p:spTree>
       <p:nvGrpSpPr>
@@ -31392,14 +31455,14 @@
   <p:clrMapOvr>
     <a:masterClrMapping/>
   </p:clrMapOvr>
-  <mc:AlternateContent xmlns:mc="http://schemas.openxmlformats.org/markup-compatibility/2006" xmlns:p14="http://schemas.microsoft.com/office/powerpoint/2010/main">
-    <mc:Choice Requires="p14">
+  <mc:AlternateContent xmlns:mc="http://schemas.openxmlformats.org/markup-compatibility/2006">
+    <mc:Choice xmlns:p14="http://schemas.microsoft.com/office/powerpoint/2010/main" Requires="p14">
       <p:transition spd="med" p14:dur="700">
         <p:fade/>
       </p:transition>
     </mc:Choice>
-    <mc:Fallback xmlns="">
-      <p:transition xmlns:p14="http://schemas.microsoft.com/office/powerpoint/2010/main" spd="med">
+    <mc:Fallback>
+      <p:transition spd="med">
         <p:fade/>
       </p:transition>
     </mc:Fallback>
@@ -31408,7 +31471,7 @@
 </file>
 
 <file path=ppt/slides/slide21.xml><?xml version="1.0" encoding="utf-8"?>
-<p:sld xmlns:a="http://schemas.openxmlformats.org/drawingml/2006/main" xmlns:r="http://schemas.openxmlformats.org/officeDocument/2006/relationships" xmlns:p="http://schemas.openxmlformats.org/presentationml/2006/main">
+<p:sld xmlns:a="http://schemas.openxmlformats.org/drawingml/2006/main" xmlns:r="http://schemas.openxmlformats.org/officeDocument/2006/relationships" xmlns:p="http://schemas.openxmlformats.org/presentationml/2006/main" show="0">
   <p:cSld>
     <p:spTree>
       <p:nvGrpSpPr>
@@ -31611,7 +31674,7 @@
 </file>
 
 <file path=ppt/slides/slide22.xml><?xml version="1.0" encoding="utf-8"?>
-<p:sld xmlns:a="http://schemas.openxmlformats.org/drawingml/2006/main" xmlns:r="http://schemas.openxmlformats.org/officeDocument/2006/relationships" xmlns:p="http://schemas.openxmlformats.org/presentationml/2006/main">
+<p:sld xmlns:a="http://schemas.openxmlformats.org/drawingml/2006/main" xmlns:r="http://schemas.openxmlformats.org/officeDocument/2006/relationships" xmlns:p="http://schemas.openxmlformats.org/presentationml/2006/main" show="0">
   <p:cSld>
     <p:spTree>
       <p:nvGrpSpPr>
@@ -31818,7 +31881,7 @@
 </file>
 
 <file path=ppt/slides/slide23.xml><?xml version="1.0" encoding="utf-8"?>
-<p:sld xmlns:a="http://schemas.openxmlformats.org/drawingml/2006/main" xmlns:r="http://schemas.openxmlformats.org/officeDocument/2006/relationships" xmlns:p="http://schemas.openxmlformats.org/presentationml/2006/main">
+<p:sld xmlns:a="http://schemas.openxmlformats.org/drawingml/2006/main" xmlns:r="http://schemas.openxmlformats.org/officeDocument/2006/relationships" xmlns:p="http://schemas.openxmlformats.org/presentationml/2006/main" show="0">
   <p:cSld>
     <p:spTree>
       <p:nvGrpSpPr>
@@ -32149,9 +32212,7 @@
           <p:cNvGraphicFramePr>
             <a:graphicFrameLocks noGrp="1"/>
           </p:cNvGraphicFramePr>
-          <p:nvPr>
-            <p:extLst/>
-          </p:nvPr>
+          <p:nvPr/>
         </p:nvGraphicFramePr>
         <p:xfrm>
           <a:off x="301658" y="1145310"/>
@@ -32876,7 +32937,6 @@
           </p:cNvGraphicFramePr>
           <p:nvPr>
             <p:ph idx="1"/>
-            <p:extLst/>
           </p:nvPr>
         </p:nvGraphicFramePr>
         <p:xfrm>
